--- a/curso/pptx/S29.pptx
+++ b/curso/pptx/S29.pptx
@@ -4477,7 +4477,7 @@
                 </a:solidFill>
                 <a:latin typeface="Nunito Sans"/>
               </a:rPr>
-              <a:t>Los voluntarios </a:t>
+              <a:t>志愿者</a:t>
             </a:r>
             <a:r>
               <a:rPr sz="2800" b="1">
@@ -4486,7 +4486,7 @@
                 </a:solidFill>
                 <a:latin typeface="Nunito Sans"/>
               </a:rPr>
-              <a:t>sufrieron</a:t>
+              <a:t>很痛苦</a:t>
             </a:r>
             <a:r>
               <a:rPr sz="2800" b="0">
@@ -4495,7 +4495,7 @@
                 </a:solidFill>
                 <a:latin typeface="Nunito Sans"/>
               </a:rPr>
-              <a:t>: sudaban, temblaban, algunos tenían ataques de risa nerviosa</a:t>
+              <a:t>：他们出汗，发抖，有些人还会紧张地大笑</a:t>
             </a:r>
           </a:p>
           <a:p>
@@ -4520,7 +4520,7 @@
                 </a:solidFill>
                 <a:latin typeface="Nunito Sans"/>
               </a:rPr>
-              <a:t>Los </a:t>
+              <a:t>他们被</a:t>
             </a:r>
             <a:r>
               <a:rPr sz="2800" b="1">
@@ -4529,7 +4529,7 @@
                 </a:solidFill>
                 <a:latin typeface="Nunito Sans"/>
               </a:rPr>
-              <a:t>engañaron</a:t>
+              <a:t>欺骗</a:t>
             </a:r>
             <a:r>
               <a:rPr sz="2800" b="0">
@@ -4538,7 +4538,7 @@
                 </a:solidFill>
                 <a:latin typeface="Nunito Sans"/>
               </a:rPr>
-              <a:t>: no sabían de qué iba de verdad</a:t>
+              <a:t>了：不知道这到底是怎么回事</a:t>
             </a:r>
           </a:p>
           <a:p>
@@ -4563,7 +4563,7 @@
                 </a:solidFill>
                 <a:latin typeface="Nunito Sans"/>
               </a:rPr>
-              <a:t>Era muy difícil </a:t>
+              <a:t>很难</a:t>
             </a:r>
             <a:r>
               <a:rPr sz="2800" b="1">
@@ -4572,7 +4572,7 @@
                 </a:solidFill>
                 <a:latin typeface="Nunito Sans"/>
               </a:rPr>
-              <a:t>dejarlo</a:t>
+              <a:t>停下来</a:t>
             </a:r>
             <a:r>
               <a:rPr sz="2800" b="0">
@@ -4581,7 +4581,7 @@
                 </a:solidFill>
                 <a:latin typeface="Nunito Sans"/>
               </a:rPr>
-              <a:t>: el científico insistía</a:t>
+              <a:t>：科学家一再坚持</a:t>
             </a:r>
           </a:p>
           <a:p>
@@ -4606,7 +4606,7 @@
                 </a:solidFill>
                 <a:latin typeface="Nunito Sans"/>
               </a:rPr>
-              <a:t>Hoy un experimento así, entero, </a:t>
+              <a:t>今天，这样的实验，完整地做，</a:t>
             </a:r>
             <a:r>
               <a:rPr sz="2800" b="1">
@@ -4615,7 +4615,7 @@
                 </a:solidFill>
                 <a:latin typeface="Nunito Sans"/>
               </a:rPr>
-              <a:t>no estaría permitido</a:t>
+              <a:t>是不被允许的</a:t>
             </a:r>
           </a:p>
         </p:txBody>
@@ -4767,7 +4767,7 @@
                 </a:solidFill>
                 <a:latin typeface="Nunito Sans"/>
               </a:rPr>
-              <a:t>Milgram hizo muchas versiones: en unas obedeció casi nadie, en otras casi todos</a:t>
+              <a:t>Milgram 做了很多版本：有的几乎没有人服从，有的几乎所有人都服从</a:t>
             </a:r>
           </a:p>
           <a:p>
@@ -4792,7 +4792,7 @@
                 </a:solidFill>
                 <a:latin typeface="Nunito Sans"/>
               </a:rPr>
-              <a:t>Algunos voluntarios dudaban de que las descargas fueran reales</a:t>
+              <a:t>有些志愿者怀疑电击是不是真的</a:t>
             </a:r>
           </a:p>
           <a:p>
@@ -4817,7 +4817,7 @@
                 </a:solidFill>
                 <a:latin typeface="Nunito Sans"/>
               </a:rPr>
-              <a:t>Cuando el científico decía «No tiene otra opción», muchos se negaban</a:t>
+              <a:t>当科学家说“你没有别的选择”时，很多人拒绝了</a:t>
             </a:r>
           </a:p>
           <a:p>
@@ -4842,7 +4842,7 @@
                 </a:solidFill>
                 <a:latin typeface="Nunito Sans"/>
               </a:rPr>
-              <a:t>Quizá muchos no obedecían a ciegas: creían que ayudaban a la ciencia</a:t>
+              <a:t>也许很多人并不是盲目服从：他们认为自己是在帮助科学</a:t>
             </a:r>
           </a:p>
         </p:txBody>
@@ -7536,7 +7536,7 @@
                 </a:solidFill>
                 <a:latin typeface="Nunito Sans"/>
               </a:rPr>
-              <a:t>La estudió el psicólogo </a:t>
+              <a:t>心理学家 </a:t>
             </a:r>
             <a:r>
               <a:rPr sz="2800" b="1">
@@ -7554,7 +7554,7 @@
                 </a:solidFill>
                 <a:latin typeface="Nunito Sans"/>
               </a:rPr>
-              <a:t>, en Estados Unidos</a:t>
+              <a:t> 在美国研究了它</a:t>
             </a:r>
           </a:p>
           <a:p>
@@ -7579,7 +7579,7 @@
                 </a:solidFill>
                 <a:latin typeface="Nunito Sans"/>
               </a:rPr>
-              <a:t>Pasa aunque el grupo esté equivocado</a:t>
+              <a:t>即使群体是错的，也会发生</a:t>
             </a:r>
           </a:p>
           <a:p>
@@ -7604,7 +7604,7 @@
                 </a:solidFill>
                 <a:latin typeface="Nunito Sans"/>
               </a:rPr>
-              <a:t>Recuerda la 第28课: la prueba social</a:t>
+              <a:t>记住第28课：社会认同</a:t>
             </a:r>
           </a:p>
         </p:txBody>
@@ -8269,7 +8269,7 @@
                 </a:solidFill>
                 <a:latin typeface="Nunito Sans"/>
               </a:rPr>
-              <a:t>Obedecer normas justas es necesario para convivir</a:t>
+              <a:t>服从公平的规则对共同生活是必要的</a:t>
             </a:r>
           </a:p>
           <a:p>
@@ -8294,7 +8294,7 @@
                 </a:solidFill>
                 <a:latin typeface="Nunito Sans"/>
               </a:rPr>
-              <a:t>El problema es obedecer </a:t>
+              <a:t>问题是</a:t>
             </a:r>
             <a:r>
               <a:rPr sz="2800" b="1">
@@ -8303,7 +8303,16 @@
                 </a:solidFill>
                 <a:latin typeface="Nunito Sans"/>
               </a:rPr>
-              <a:t>sin pensar</a:t>
+              <a:t>不假思索地</a:t>
+            </a:r>
+            <a:r>
+              <a:rPr sz="2800" b="0">
+                <a:solidFill>
+                  <a:srgbClr val="1F2A44"/>
+                </a:solidFill>
+                <a:latin typeface="Nunito Sans"/>
+              </a:rPr>
+              <a:t>服从</a:t>
             </a:r>
           </a:p>
           <a:p>
@@ -8328,7 +8337,7 @@
                 </a:solidFill>
                 <a:latin typeface="Nunito Sans"/>
               </a:rPr>
-              <a:t>Recuerda la 第25课: autoridad por poder</a:t>
+              <a:t>记住第25课：凭权力的权威</a:t>
             </a:r>
           </a:p>
         </p:txBody>

--- a/curso/pptx/S29.pptx
+++ b/curso/pptx/S29.pptx
@@ -5603,7 +5603,7 @@
                 </a:solidFill>
                 <a:latin typeface="Nunito Sans"/>
               </a:rPr>
-              <a:t>演习的警报响了。老师说：“排成队，走B楼梯。”所有人排队出去。Maialen 也是，没有争论。</a:t>
+              <a:t>演习的警报响了。老师说：“排成队，走B楼梯。”所有人排队出去。一个女孩也是，没有争论。</a:t>
             </a:r>
           </a:p>
         </p:txBody>
